--- a/TurnBasedPokemon/PokemonGame_NhaBui.pptx
+++ b/TurnBasedPokemon/PokemonGame_NhaBui.pptx
@@ -282,7 +282,7 @@
       <p15:sldGuideLst xmlns:p15="http://schemas.microsoft.com/office/powerpoint/2012/main"/>
     </p:ext>
     <p:ext uri="http://customooxmlschemas.google.com/">
-      <go:slidesCustomData xmlns:go="http://customooxmlschemas.google.com/" xmlns:ahyp="http://schemas.microsoft.com/office/drawing/2018/hyperlinkcolor" xmlns:p15="http://schemas.microsoft.com/office/powerpoint/2012/main" xmlns:p14="http://schemas.microsoft.com/office/powerpoint/2010/main" xmlns:com="http://schemas.openxmlformats.org/drawingml/2006/compatibility" xmlns:pvml="urn:schemas-microsoft-com:office:powerpoint" xmlns:v="urn:schemas-microsoft-com:vml" xmlns:o="urn:schemas-microsoft-com:office:office" xmlns:dgm="http://schemas.openxmlformats.org/drawingml/2006/diagram" xmlns:c="http://schemas.openxmlformats.org/drawingml/2006/chart" xmlns:mv="urn:schemas-microsoft-com:mac:vml" xmlns:mc="http://schemas.openxmlformats.org/markup-compatibility/2006" xmlns="" r:id="rId32" roundtripDataSignature="AMtx7mjQzsN6F5iOvpaxnahMAkKru8cO+A=="/>
+      <go:slidesCustomData xmlns="" xmlns:mc="http://schemas.openxmlformats.org/markup-compatibility/2006" xmlns:mv="urn:schemas-microsoft-com:mac:vml" xmlns:c="http://schemas.openxmlformats.org/drawingml/2006/chart" xmlns:dgm="http://schemas.openxmlformats.org/drawingml/2006/diagram" xmlns:o="urn:schemas-microsoft-com:office:office" xmlns:v="urn:schemas-microsoft-com:vml" xmlns:pvml="urn:schemas-microsoft-com:office:powerpoint" xmlns:com="http://schemas.openxmlformats.org/drawingml/2006/compatibility" xmlns:p14="http://schemas.microsoft.com/office/powerpoint/2010/main" xmlns:p15="http://schemas.microsoft.com/office/powerpoint/2012/main" xmlns:ahyp="http://schemas.microsoft.com/office/drawing/2018/hyperlinkcolor" xmlns:go="http://customooxmlschemas.google.com/" r:id="rId32" roundtripDataSignature="AMtx7mjQzsN6F5iOvpaxnahMAkKru8cO+A=="/>
     </p:ext>
   </p:extLst>
 </p:presentation>
@@ -4342,7 +4342,7 @@
         <p:fade/>
       </p:transition>
     </mc:Choice>
-    <mc:Fallback xmlns:ahyp="http://schemas.microsoft.com/office/drawing/2018/hyperlinkcolor" xmlns:p15="http://schemas.microsoft.com/office/powerpoint/2012/main" xmlns:com="http://schemas.openxmlformats.org/drawingml/2006/compatibility" xmlns:pvml="urn:schemas-microsoft-com:office:powerpoint" xmlns:v="urn:schemas-microsoft-com:vml" xmlns:o="urn:schemas-microsoft-com:office:office" xmlns:dgm="http://schemas.openxmlformats.org/drawingml/2006/diagram" xmlns:c="http://schemas.openxmlformats.org/drawingml/2006/chart" xmlns:mv="urn:schemas-microsoft-com:mac:vml" xmlns="">
+    <mc:Fallback xmlns="" xmlns:mv="urn:schemas-microsoft-com:mac:vml" xmlns:c="http://schemas.openxmlformats.org/drawingml/2006/chart" xmlns:dgm="http://schemas.openxmlformats.org/drawingml/2006/diagram" xmlns:o="urn:schemas-microsoft-com:office:office" xmlns:v="urn:schemas-microsoft-com:vml" xmlns:pvml="urn:schemas-microsoft-com:office:powerpoint" xmlns:com="http://schemas.openxmlformats.org/drawingml/2006/compatibility" xmlns:p15="http://schemas.microsoft.com/office/powerpoint/2012/main" xmlns:ahyp="http://schemas.microsoft.com/office/drawing/2018/hyperlinkcolor">
       <p:transition spd="slow">
         <p:fade/>
       </p:transition>
@@ -4894,7 +4894,7 @@
         <p:fade/>
       </p:transition>
     </mc:Choice>
-    <mc:Fallback xmlns:ahyp="http://schemas.microsoft.com/office/drawing/2018/hyperlinkcolor" xmlns:p15="http://schemas.microsoft.com/office/powerpoint/2012/main" xmlns:com="http://schemas.openxmlformats.org/drawingml/2006/compatibility" xmlns:pvml="urn:schemas-microsoft-com:office:powerpoint" xmlns:v="urn:schemas-microsoft-com:vml" xmlns:o="urn:schemas-microsoft-com:office:office" xmlns:dgm="http://schemas.openxmlformats.org/drawingml/2006/diagram" xmlns:c="http://schemas.openxmlformats.org/drawingml/2006/chart" xmlns:mv="urn:schemas-microsoft-com:mac:vml" xmlns="">
+    <mc:Fallback xmlns="" xmlns:mv="urn:schemas-microsoft-com:mac:vml" xmlns:c="http://schemas.openxmlformats.org/drawingml/2006/chart" xmlns:dgm="http://schemas.openxmlformats.org/drawingml/2006/diagram" xmlns:o="urn:schemas-microsoft-com:office:office" xmlns:v="urn:schemas-microsoft-com:vml" xmlns:pvml="urn:schemas-microsoft-com:office:powerpoint" xmlns:com="http://schemas.openxmlformats.org/drawingml/2006/compatibility" xmlns:p15="http://schemas.microsoft.com/office/powerpoint/2012/main" xmlns:ahyp="http://schemas.microsoft.com/office/drawing/2018/hyperlinkcolor">
       <p:transition spd="slow">
         <p:fade/>
       </p:transition>
@@ -5454,7 +5454,7 @@
         <p:fade/>
       </p:transition>
     </mc:Choice>
-    <mc:Fallback xmlns:ahyp="http://schemas.microsoft.com/office/drawing/2018/hyperlinkcolor" xmlns:p15="http://schemas.microsoft.com/office/powerpoint/2012/main" xmlns:com="http://schemas.openxmlformats.org/drawingml/2006/compatibility" xmlns:pvml="urn:schemas-microsoft-com:office:powerpoint" xmlns:v="urn:schemas-microsoft-com:vml" xmlns:o="urn:schemas-microsoft-com:office:office" xmlns:dgm="http://schemas.openxmlformats.org/drawingml/2006/diagram" xmlns:c="http://schemas.openxmlformats.org/drawingml/2006/chart" xmlns:mv="urn:schemas-microsoft-com:mac:vml" xmlns="">
+    <mc:Fallback xmlns="" xmlns:mv="urn:schemas-microsoft-com:mac:vml" xmlns:c="http://schemas.openxmlformats.org/drawingml/2006/chart" xmlns:dgm="http://schemas.openxmlformats.org/drawingml/2006/diagram" xmlns:o="urn:schemas-microsoft-com:office:office" xmlns:v="urn:schemas-microsoft-com:vml" xmlns:pvml="urn:schemas-microsoft-com:office:powerpoint" xmlns:com="http://schemas.openxmlformats.org/drawingml/2006/compatibility" xmlns:p15="http://schemas.microsoft.com/office/powerpoint/2012/main" xmlns:ahyp="http://schemas.microsoft.com/office/drawing/2018/hyperlinkcolor">
       <p:transition spd="slow">
         <p:fade/>
       </p:transition>
@@ -6111,7 +6111,7 @@
         <p:fade/>
       </p:transition>
     </mc:Choice>
-    <mc:Fallback xmlns:ahyp="http://schemas.microsoft.com/office/drawing/2018/hyperlinkcolor" xmlns:p15="http://schemas.microsoft.com/office/powerpoint/2012/main" xmlns:com="http://schemas.openxmlformats.org/drawingml/2006/compatibility" xmlns:pvml="urn:schemas-microsoft-com:office:powerpoint" xmlns:v="urn:schemas-microsoft-com:vml" xmlns:o="urn:schemas-microsoft-com:office:office" xmlns:dgm="http://schemas.openxmlformats.org/drawingml/2006/diagram" xmlns:c="http://schemas.openxmlformats.org/drawingml/2006/chart" xmlns:mv="urn:schemas-microsoft-com:mac:vml" xmlns="">
+    <mc:Fallback xmlns="" xmlns:mv="urn:schemas-microsoft-com:mac:vml" xmlns:c="http://schemas.openxmlformats.org/drawingml/2006/chart" xmlns:dgm="http://schemas.openxmlformats.org/drawingml/2006/diagram" xmlns:o="urn:schemas-microsoft-com:office:office" xmlns:v="urn:schemas-microsoft-com:vml" xmlns:pvml="urn:schemas-microsoft-com:office:powerpoint" xmlns:com="http://schemas.openxmlformats.org/drawingml/2006/compatibility" xmlns:p15="http://schemas.microsoft.com/office/powerpoint/2012/main" xmlns:ahyp="http://schemas.microsoft.com/office/drawing/2018/hyperlinkcolor">
       <p:transition spd="slow">
         <p:fade/>
       </p:transition>
@@ -6891,7 +6891,7 @@
         <p:fade/>
       </p:transition>
     </mc:Choice>
-    <mc:Fallback xmlns:ahyp="http://schemas.microsoft.com/office/drawing/2018/hyperlinkcolor" xmlns:p15="http://schemas.microsoft.com/office/powerpoint/2012/main" xmlns:com="http://schemas.openxmlformats.org/drawingml/2006/compatibility" xmlns:pvml="urn:schemas-microsoft-com:office:powerpoint" xmlns:v="urn:schemas-microsoft-com:vml" xmlns:o="urn:schemas-microsoft-com:office:office" xmlns:dgm="http://schemas.openxmlformats.org/drawingml/2006/diagram" xmlns:c="http://schemas.openxmlformats.org/drawingml/2006/chart" xmlns:mv="urn:schemas-microsoft-com:mac:vml" xmlns="">
+    <mc:Fallback xmlns="" xmlns:mv="urn:schemas-microsoft-com:mac:vml" xmlns:c="http://schemas.openxmlformats.org/drawingml/2006/chart" xmlns:dgm="http://schemas.openxmlformats.org/drawingml/2006/diagram" xmlns:o="urn:schemas-microsoft-com:office:office" xmlns:v="urn:schemas-microsoft-com:vml" xmlns:pvml="urn:schemas-microsoft-com:office:powerpoint" xmlns:com="http://schemas.openxmlformats.org/drawingml/2006/compatibility" xmlns:p15="http://schemas.microsoft.com/office/powerpoint/2012/main" xmlns:ahyp="http://schemas.microsoft.com/office/drawing/2018/hyperlinkcolor">
       <p:transition spd="slow">
         <p:fade/>
       </p:transition>
@@ -7862,7 +7862,7 @@
         <p:fade/>
       </p:transition>
     </mc:Choice>
-    <mc:Fallback xmlns:ahyp="http://schemas.microsoft.com/office/drawing/2018/hyperlinkcolor" xmlns:p15="http://schemas.microsoft.com/office/powerpoint/2012/main" xmlns:com="http://schemas.openxmlformats.org/drawingml/2006/compatibility" xmlns:pvml="urn:schemas-microsoft-com:office:powerpoint" xmlns:v="urn:schemas-microsoft-com:vml" xmlns:o="urn:schemas-microsoft-com:office:office" xmlns:dgm="http://schemas.openxmlformats.org/drawingml/2006/diagram" xmlns:c="http://schemas.openxmlformats.org/drawingml/2006/chart" xmlns:mv="urn:schemas-microsoft-com:mac:vml" xmlns="">
+    <mc:Fallback xmlns="" xmlns:mv="urn:schemas-microsoft-com:mac:vml" xmlns:c="http://schemas.openxmlformats.org/drawingml/2006/chart" xmlns:dgm="http://schemas.openxmlformats.org/drawingml/2006/diagram" xmlns:o="urn:schemas-microsoft-com:office:office" xmlns:v="urn:schemas-microsoft-com:vml" xmlns:pvml="urn:schemas-microsoft-com:office:powerpoint" xmlns:com="http://schemas.openxmlformats.org/drawingml/2006/compatibility" xmlns:p15="http://schemas.microsoft.com/office/powerpoint/2012/main" xmlns:ahyp="http://schemas.microsoft.com/office/drawing/2018/hyperlinkcolor">
       <p:transition spd="slow">
         <p:fade/>
       </p:transition>
@@ -9162,7 +9162,7 @@
         <p:fade/>
       </p:transition>
     </mc:Choice>
-    <mc:Fallback xmlns:ahyp="http://schemas.microsoft.com/office/drawing/2018/hyperlinkcolor" xmlns:p15="http://schemas.microsoft.com/office/powerpoint/2012/main" xmlns:com="http://schemas.openxmlformats.org/drawingml/2006/compatibility" xmlns:pvml="urn:schemas-microsoft-com:office:powerpoint" xmlns:v="urn:schemas-microsoft-com:vml" xmlns:o="urn:schemas-microsoft-com:office:office" xmlns:dgm="http://schemas.openxmlformats.org/drawingml/2006/diagram" xmlns:c="http://schemas.openxmlformats.org/drawingml/2006/chart" xmlns:mv="urn:schemas-microsoft-com:mac:vml" xmlns="">
+    <mc:Fallback xmlns="" xmlns:mv="urn:schemas-microsoft-com:mac:vml" xmlns:c="http://schemas.openxmlformats.org/drawingml/2006/chart" xmlns:dgm="http://schemas.openxmlformats.org/drawingml/2006/diagram" xmlns:o="urn:schemas-microsoft-com:office:office" xmlns:v="urn:schemas-microsoft-com:vml" xmlns:pvml="urn:schemas-microsoft-com:office:powerpoint" xmlns:com="http://schemas.openxmlformats.org/drawingml/2006/compatibility" xmlns:p15="http://schemas.microsoft.com/office/powerpoint/2012/main" xmlns:ahyp="http://schemas.microsoft.com/office/drawing/2018/hyperlinkcolor">
       <p:transition spd="slow">
         <p:fade/>
       </p:transition>
@@ -9714,7 +9714,7 @@
         <p:fade/>
       </p:transition>
     </mc:Choice>
-    <mc:Fallback xmlns:ahyp="http://schemas.microsoft.com/office/drawing/2018/hyperlinkcolor" xmlns:p15="http://schemas.microsoft.com/office/powerpoint/2012/main" xmlns:com="http://schemas.openxmlformats.org/drawingml/2006/compatibility" xmlns:pvml="urn:schemas-microsoft-com:office:powerpoint" xmlns:v="urn:schemas-microsoft-com:vml" xmlns:o="urn:schemas-microsoft-com:office:office" xmlns:dgm="http://schemas.openxmlformats.org/drawingml/2006/diagram" xmlns:c="http://schemas.openxmlformats.org/drawingml/2006/chart" xmlns:mv="urn:schemas-microsoft-com:mac:vml" xmlns="">
+    <mc:Fallback xmlns="" xmlns:mv="urn:schemas-microsoft-com:mac:vml" xmlns:c="http://schemas.openxmlformats.org/drawingml/2006/chart" xmlns:dgm="http://schemas.openxmlformats.org/drawingml/2006/diagram" xmlns:o="urn:schemas-microsoft-com:office:office" xmlns:v="urn:schemas-microsoft-com:vml" xmlns:pvml="urn:schemas-microsoft-com:office:powerpoint" xmlns:com="http://schemas.openxmlformats.org/drawingml/2006/compatibility" xmlns:p15="http://schemas.microsoft.com/office/powerpoint/2012/main" xmlns:ahyp="http://schemas.microsoft.com/office/drawing/2018/hyperlinkcolor">
       <p:transition spd="slow">
         <p:fade/>
       </p:transition>
@@ -10641,7 +10641,7 @@
         <p:fade/>
       </p:transition>
     </mc:Choice>
-    <mc:Fallback xmlns:ahyp="http://schemas.microsoft.com/office/drawing/2018/hyperlinkcolor" xmlns:p15="http://schemas.microsoft.com/office/powerpoint/2012/main" xmlns:com="http://schemas.openxmlformats.org/drawingml/2006/compatibility" xmlns:pvml="urn:schemas-microsoft-com:office:powerpoint" xmlns:v="urn:schemas-microsoft-com:vml" xmlns:o="urn:schemas-microsoft-com:office:office" xmlns:dgm="http://schemas.openxmlformats.org/drawingml/2006/diagram" xmlns:c="http://schemas.openxmlformats.org/drawingml/2006/chart" xmlns:mv="urn:schemas-microsoft-com:mac:vml" xmlns="">
+    <mc:Fallback xmlns="" xmlns:mv="urn:schemas-microsoft-com:mac:vml" xmlns:c="http://schemas.openxmlformats.org/drawingml/2006/chart" xmlns:dgm="http://schemas.openxmlformats.org/drawingml/2006/diagram" xmlns:o="urn:schemas-microsoft-com:office:office" xmlns:v="urn:schemas-microsoft-com:vml" xmlns:pvml="urn:schemas-microsoft-com:office:powerpoint" xmlns:com="http://schemas.openxmlformats.org/drawingml/2006/compatibility" xmlns:p15="http://schemas.microsoft.com/office/powerpoint/2012/main" xmlns:ahyp="http://schemas.microsoft.com/office/drawing/2018/hyperlinkcolor">
       <p:transition spd="slow">
         <p:fade/>
       </p:transition>
@@ -11405,7 +11405,7 @@
         <p:fade/>
       </p:transition>
     </mc:Choice>
-    <mc:Fallback xmlns:ahyp="http://schemas.microsoft.com/office/drawing/2018/hyperlinkcolor" xmlns:p15="http://schemas.microsoft.com/office/powerpoint/2012/main" xmlns:com="http://schemas.openxmlformats.org/drawingml/2006/compatibility" xmlns:pvml="urn:schemas-microsoft-com:office:powerpoint" xmlns:v="urn:schemas-microsoft-com:vml" xmlns:o="urn:schemas-microsoft-com:office:office" xmlns:dgm="http://schemas.openxmlformats.org/drawingml/2006/diagram" xmlns:c="http://schemas.openxmlformats.org/drawingml/2006/chart" xmlns:mv="urn:schemas-microsoft-com:mac:vml" xmlns="">
+    <mc:Fallback xmlns="" xmlns:mv="urn:schemas-microsoft-com:mac:vml" xmlns:c="http://schemas.openxmlformats.org/drawingml/2006/chart" xmlns:dgm="http://schemas.openxmlformats.org/drawingml/2006/diagram" xmlns:o="urn:schemas-microsoft-com:office:office" xmlns:v="urn:schemas-microsoft-com:vml" xmlns:pvml="urn:schemas-microsoft-com:office:powerpoint" xmlns:com="http://schemas.openxmlformats.org/drawingml/2006/compatibility" xmlns:p15="http://schemas.microsoft.com/office/powerpoint/2012/main" xmlns:ahyp="http://schemas.microsoft.com/office/drawing/2018/hyperlinkcolor">
       <p:transition spd="slow">
         <p:fade/>
       </p:transition>
@@ -12144,7 +12144,7 @@
         <p:fade/>
       </p:transition>
     </mc:Choice>
-    <mc:Fallback xmlns:ahyp="http://schemas.microsoft.com/office/drawing/2018/hyperlinkcolor" xmlns:p15="http://schemas.microsoft.com/office/powerpoint/2012/main" xmlns:com="http://schemas.openxmlformats.org/drawingml/2006/compatibility" xmlns:pvml="urn:schemas-microsoft-com:office:powerpoint" xmlns:v="urn:schemas-microsoft-com:vml" xmlns:o="urn:schemas-microsoft-com:office:office" xmlns:dgm="http://schemas.openxmlformats.org/drawingml/2006/diagram" xmlns:c="http://schemas.openxmlformats.org/drawingml/2006/chart" xmlns:mv="urn:schemas-microsoft-com:mac:vml" xmlns="">
+    <mc:Fallback xmlns="" xmlns:mv="urn:schemas-microsoft-com:mac:vml" xmlns:c="http://schemas.openxmlformats.org/drawingml/2006/chart" xmlns:dgm="http://schemas.openxmlformats.org/drawingml/2006/diagram" xmlns:o="urn:schemas-microsoft-com:office:office" xmlns:v="urn:schemas-microsoft-com:vml" xmlns:pvml="urn:schemas-microsoft-com:office:powerpoint" xmlns:com="http://schemas.openxmlformats.org/drawingml/2006/compatibility" xmlns:p15="http://schemas.microsoft.com/office/powerpoint/2012/main" xmlns:ahyp="http://schemas.microsoft.com/office/drawing/2018/hyperlinkcolor">
       <p:transition spd="slow">
         <p:fade/>
       </p:transition>
@@ -13265,7 +13265,7 @@
         <p:fade/>
       </p:transition>
     </mc:Choice>
-    <mc:Fallback xmlns:ahyp="http://schemas.microsoft.com/office/drawing/2018/hyperlinkcolor" xmlns:p15="http://schemas.microsoft.com/office/powerpoint/2012/main" xmlns:com="http://schemas.openxmlformats.org/drawingml/2006/compatibility" xmlns:pvml="urn:schemas-microsoft-com:office:powerpoint" xmlns:v="urn:schemas-microsoft-com:vml" xmlns:o="urn:schemas-microsoft-com:office:office" xmlns:dgm="http://schemas.openxmlformats.org/drawingml/2006/diagram" xmlns:c="http://schemas.openxmlformats.org/drawingml/2006/chart" xmlns:mv="urn:schemas-microsoft-com:mac:vml" xmlns="">
+    <mc:Fallback xmlns="" xmlns:mv="urn:schemas-microsoft-com:mac:vml" xmlns:c="http://schemas.openxmlformats.org/drawingml/2006/chart" xmlns:dgm="http://schemas.openxmlformats.org/drawingml/2006/diagram" xmlns:o="urn:schemas-microsoft-com:office:office" xmlns:v="urn:schemas-microsoft-com:vml" xmlns:pvml="urn:schemas-microsoft-com:office:powerpoint" xmlns:com="http://schemas.openxmlformats.org/drawingml/2006/compatibility" xmlns:p15="http://schemas.microsoft.com/office/powerpoint/2012/main" xmlns:ahyp="http://schemas.microsoft.com/office/drawing/2018/hyperlinkcolor">
       <p:transition spd="slow">
         <p:fade/>
       </p:transition>
@@ -14244,7 +14244,7 @@
         <p:fade/>
       </p:transition>
     </mc:Choice>
-    <mc:Fallback xmlns:ahyp="http://schemas.microsoft.com/office/drawing/2018/hyperlinkcolor" xmlns:p15="http://schemas.microsoft.com/office/powerpoint/2012/main" xmlns:com="http://schemas.openxmlformats.org/drawingml/2006/compatibility" xmlns:pvml="urn:schemas-microsoft-com:office:powerpoint" xmlns:v="urn:schemas-microsoft-com:vml" xmlns:o="urn:schemas-microsoft-com:office:office" xmlns:dgm="http://schemas.openxmlformats.org/drawingml/2006/diagram" xmlns:c="http://schemas.openxmlformats.org/drawingml/2006/chart" xmlns:mv="urn:schemas-microsoft-com:mac:vml" xmlns="">
+    <mc:Fallback xmlns="" xmlns:mv="urn:schemas-microsoft-com:mac:vml" xmlns:c="http://schemas.openxmlformats.org/drawingml/2006/chart" xmlns:dgm="http://schemas.openxmlformats.org/drawingml/2006/diagram" xmlns:o="urn:schemas-microsoft-com:office:office" xmlns:v="urn:schemas-microsoft-com:vml" xmlns:pvml="urn:schemas-microsoft-com:office:powerpoint" xmlns:com="http://schemas.openxmlformats.org/drawingml/2006/compatibility" xmlns:p15="http://schemas.microsoft.com/office/powerpoint/2012/main" xmlns:ahyp="http://schemas.microsoft.com/office/drawing/2018/hyperlinkcolor">
       <p:transition spd="slow">
         <p:fade/>
       </p:transition>
@@ -14457,7 +14457,7 @@
         <p:fade/>
       </p:transition>
     </mc:Choice>
-    <mc:Fallback xmlns:ahyp="http://schemas.microsoft.com/office/drawing/2018/hyperlinkcolor" xmlns:p15="http://schemas.microsoft.com/office/powerpoint/2012/main" xmlns:com="http://schemas.openxmlformats.org/drawingml/2006/compatibility" xmlns:pvml="urn:schemas-microsoft-com:office:powerpoint" xmlns:v="urn:schemas-microsoft-com:vml" xmlns:o="urn:schemas-microsoft-com:office:office" xmlns:dgm="http://schemas.openxmlformats.org/drawingml/2006/diagram" xmlns:c="http://schemas.openxmlformats.org/drawingml/2006/chart" xmlns:mv="urn:schemas-microsoft-com:mac:vml" xmlns="">
+    <mc:Fallback xmlns="" xmlns:mv="urn:schemas-microsoft-com:mac:vml" xmlns:c="http://schemas.openxmlformats.org/drawingml/2006/chart" xmlns:dgm="http://schemas.openxmlformats.org/drawingml/2006/diagram" xmlns:o="urn:schemas-microsoft-com:office:office" xmlns:v="urn:schemas-microsoft-com:vml" xmlns:pvml="urn:schemas-microsoft-com:office:powerpoint" xmlns:com="http://schemas.openxmlformats.org/drawingml/2006/compatibility" xmlns:p15="http://schemas.microsoft.com/office/powerpoint/2012/main" xmlns:ahyp="http://schemas.microsoft.com/office/drawing/2018/hyperlinkcolor">
       <p:transition spd="slow">
         <p:fade/>
       </p:transition>
@@ -14697,7 +14697,7 @@
         <p:fade/>
       </p:transition>
     </mc:Choice>
-    <mc:Fallback xmlns:ahyp="http://schemas.microsoft.com/office/drawing/2018/hyperlinkcolor" xmlns:p15="http://schemas.microsoft.com/office/powerpoint/2012/main" xmlns:com="http://schemas.openxmlformats.org/drawingml/2006/compatibility" xmlns:pvml="urn:schemas-microsoft-com:office:powerpoint" xmlns:v="urn:schemas-microsoft-com:vml" xmlns:o="urn:schemas-microsoft-com:office:office" xmlns:dgm="http://schemas.openxmlformats.org/drawingml/2006/diagram" xmlns:c="http://schemas.openxmlformats.org/drawingml/2006/chart" xmlns:mv="urn:schemas-microsoft-com:mac:vml" xmlns="">
+    <mc:Fallback xmlns="" xmlns:mv="urn:schemas-microsoft-com:mac:vml" xmlns:c="http://schemas.openxmlformats.org/drawingml/2006/chart" xmlns:dgm="http://schemas.openxmlformats.org/drawingml/2006/diagram" xmlns:o="urn:schemas-microsoft-com:office:office" xmlns:v="urn:schemas-microsoft-com:vml" xmlns:pvml="urn:schemas-microsoft-com:office:powerpoint" xmlns:com="http://schemas.openxmlformats.org/drawingml/2006/compatibility" xmlns:p15="http://schemas.microsoft.com/office/powerpoint/2012/main" xmlns:ahyp="http://schemas.microsoft.com/office/drawing/2018/hyperlinkcolor">
       <p:transition spd="slow">
         <p:fade/>
       </p:transition>
@@ -15109,7 +15109,7 @@
         <p:fade/>
       </p:transition>
     </mc:Choice>
-    <mc:Fallback xmlns:ahyp="http://schemas.microsoft.com/office/drawing/2018/hyperlinkcolor" xmlns:p15="http://schemas.microsoft.com/office/powerpoint/2012/main" xmlns:com="http://schemas.openxmlformats.org/drawingml/2006/compatibility" xmlns:pvml="urn:schemas-microsoft-com:office:powerpoint" xmlns:v="urn:schemas-microsoft-com:vml" xmlns:o="urn:schemas-microsoft-com:office:office" xmlns:dgm="http://schemas.openxmlformats.org/drawingml/2006/diagram" xmlns:c="http://schemas.openxmlformats.org/drawingml/2006/chart" xmlns:mv="urn:schemas-microsoft-com:mac:vml" xmlns="">
+    <mc:Fallback xmlns="" xmlns:mv="urn:schemas-microsoft-com:mac:vml" xmlns:c="http://schemas.openxmlformats.org/drawingml/2006/chart" xmlns:dgm="http://schemas.openxmlformats.org/drawingml/2006/diagram" xmlns:o="urn:schemas-microsoft-com:office:office" xmlns:v="urn:schemas-microsoft-com:vml" xmlns:pvml="urn:schemas-microsoft-com:office:powerpoint" xmlns:com="http://schemas.openxmlformats.org/drawingml/2006/compatibility" xmlns:p15="http://schemas.microsoft.com/office/powerpoint/2012/main" xmlns:ahyp="http://schemas.microsoft.com/office/drawing/2018/hyperlinkcolor">
       <p:transition spd="slow">
         <p:fade/>
       </p:transition>
@@ -15345,7 +15345,7 @@
         <p:fade/>
       </p:transition>
     </mc:Choice>
-    <mc:Fallback xmlns:ahyp="http://schemas.microsoft.com/office/drawing/2018/hyperlinkcolor" xmlns:p15="http://schemas.microsoft.com/office/powerpoint/2012/main" xmlns:com="http://schemas.openxmlformats.org/drawingml/2006/compatibility" xmlns:pvml="urn:schemas-microsoft-com:office:powerpoint" xmlns:v="urn:schemas-microsoft-com:vml" xmlns:o="urn:schemas-microsoft-com:office:office" xmlns:dgm="http://schemas.openxmlformats.org/drawingml/2006/diagram" xmlns:c="http://schemas.openxmlformats.org/drawingml/2006/chart" xmlns:mv="urn:schemas-microsoft-com:mac:vml" xmlns="">
+    <mc:Fallback xmlns="" xmlns:mv="urn:schemas-microsoft-com:mac:vml" xmlns:c="http://schemas.openxmlformats.org/drawingml/2006/chart" xmlns:dgm="http://schemas.openxmlformats.org/drawingml/2006/diagram" xmlns:o="urn:schemas-microsoft-com:office:office" xmlns:v="urn:schemas-microsoft-com:vml" xmlns:pvml="urn:schemas-microsoft-com:office:powerpoint" xmlns:com="http://schemas.openxmlformats.org/drawingml/2006/compatibility" xmlns:p15="http://schemas.microsoft.com/office/powerpoint/2012/main" xmlns:ahyp="http://schemas.microsoft.com/office/drawing/2018/hyperlinkcolor">
       <p:transition spd="slow">
         <p:fade/>
       </p:transition>
@@ -15546,7 +15546,7 @@
         <p:fade/>
       </p:transition>
     </mc:Choice>
-    <mc:Fallback xmlns:ahyp="http://schemas.microsoft.com/office/drawing/2018/hyperlinkcolor" xmlns:p15="http://schemas.microsoft.com/office/powerpoint/2012/main" xmlns:com="http://schemas.openxmlformats.org/drawingml/2006/compatibility" xmlns:pvml="urn:schemas-microsoft-com:office:powerpoint" xmlns:v="urn:schemas-microsoft-com:vml" xmlns:o="urn:schemas-microsoft-com:office:office" xmlns:dgm="http://schemas.openxmlformats.org/drawingml/2006/diagram" xmlns:c="http://schemas.openxmlformats.org/drawingml/2006/chart" xmlns:mv="urn:schemas-microsoft-com:mac:vml" xmlns="">
+    <mc:Fallback xmlns="" xmlns:mv="urn:schemas-microsoft-com:mac:vml" xmlns:c="http://schemas.openxmlformats.org/drawingml/2006/chart" xmlns:dgm="http://schemas.openxmlformats.org/drawingml/2006/diagram" xmlns:o="urn:schemas-microsoft-com:office:office" xmlns:v="urn:schemas-microsoft-com:vml" xmlns:pvml="urn:schemas-microsoft-com:office:powerpoint" xmlns:com="http://schemas.openxmlformats.org/drawingml/2006/compatibility" xmlns:p15="http://schemas.microsoft.com/office/powerpoint/2012/main" xmlns:ahyp="http://schemas.microsoft.com/office/drawing/2018/hyperlinkcolor">
       <p:transition spd="slow">
         <p:fade/>
       </p:transition>
@@ -15712,7 +15712,7 @@
         <p:fade/>
       </p:transition>
     </mc:Choice>
-    <mc:Fallback xmlns:ahyp="http://schemas.microsoft.com/office/drawing/2018/hyperlinkcolor" xmlns:p15="http://schemas.microsoft.com/office/powerpoint/2012/main" xmlns:com="http://schemas.openxmlformats.org/drawingml/2006/compatibility" xmlns:pvml="urn:schemas-microsoft-com:office:powerpoint" xmlns:v="urn:schemas-microsoft-com:vml" xmlns:o="urn:schemas-microsoft-com:office:office" xmlns:dgm="http://schemas.openxmlformats.org/drawingml/2006/diagram" xmlns:c="http://schemas.openxmlformats.org/drawingml/2006/chart" xmlns:mv="urn:schemas-microsoft-com:mac:vml" xmlns="">
+    <mc:Fallback xmlns="" xmlns:mv="urn:schemas-microsoft-com:mac:vml" xmlns:c="http://schemas.openxmlformats.org/drawingml/2006/chart" xmlns:dgm="http://schemas.openxmlformats.org/drawingml/2006/diagram" xmlns:o="urn:schemas-microsoft-com:office:office" xmlns:v="urn:schemas-microsoft-com:vml" xmlns:pvml="urn:schemas-microsoft-com:office:powerpoint" xmlns:com="http://schemas.openxmlformats.org/drawingml/2006/compatibility" xmlns:p15="http://schemas.microsoft.com/office/powerpoint/2012/main" xmlns:ahyp="http://schemas.microsoft.com/office/drawing/2018/hyperlinkcolor">
       <p:transition spd="slow">
         <p:fade/>
       </p:transition>
@@ -15950,7 +15950,7 @@
         <p:fade/>
       </p:transition>
     </mc:Choice>
-    <mc:Fallback xmlns:ahyp="http://schemas.microsoft.com/office/drawing/2018/hyperlinkcolor" xmlns:p15="http://schemas.microsoft.com/office/powerpoint/2012/main" xmlns:com="http://schemas.openxmlformats.org/drawingml/2006/compatibility" xmlns:pvml="urn:schemas-microsoft-com:office:powerpoint" xmlns:v="urn:schemas-microsoft-com:vml" xmlns:o="urn:schemas-microsoft-com:office:office" xmlns:dgm="http://schemas.openxmlformats.org/drawingml/2006/diagram" xmlns:c="http://schemas.openxmlformats.org/drawingml/2006/chart" xmlns:mv="urn:schemas-microsoft-com:mac:vml" xmlns="">
+    <mc:Fallback xmlns="" xmlns:mv="urn:schemas-microsoft-com:mac:vml" xmlns:c="http://schemas.openxmlformats.org/drawingml/2006/chart" xmlns:dgm="http://schemas.openxmlformats.org/drawingml/2006/diagram" xmlns:o="urn:schemas-microsoft-com:office:office" xmlns:v="urn:schemas-microsoft-com:vml" xmlns:pvml="urn:schemas-microsoft-com:office:powerpoint" xmlns:com="http://schemas.openxmlformats.org/drawingml/2006/compatibility" xmlns:p15="http://schemas.microsoft.com/office/powerpoint/2012/main" xmlns:ahyp="http://schemas.microsoft.com/office/drawing/2018/hyperlinkcolor">
       <p:transition spd="slow">
         <p:fade/>
       </p:transition>
@@ -16183,7 +16183,7 @@
         <p:fade/>
       </p:transition>
     </mc:Choice>
-    <mc:Fallback xmlns:ahyp="http://schemas.microsoft.com/office/drawing/2018/hyperlinkcolor" xmlns:p15="http://schemas.microsoft.com/office/powerpoint/2012/main" xmlns:com="http://schemas.openxmlformats.org/drawingml/2006/compatibility" xmlns:pvml="urn:schemas-microsoft-com:office:powerpoint" xmlns:v="urn:schemas-microsoft-com:vml" xmlns:o="urn:schemas-microsoft-com:office:office" xmlns:dgm="http://schemas.openxmlformats.org/drawingml/2006/diagram" xmlns:c="http://schemas.openxmlformats.org/drawingml/2006/chart" xmlns:mv="urn:schemas-microsoft-com:mac:vml" xmlns="">
+    <mc:Fallback xmlns="" xmlns:mv="urn:schemas-microsoft-com:mac:vml" xmlns:c="http://schemas.openxmlformats.org/drawingml/2006/chart" xmlns:dgm="http://schemas.openxmlformats.org/drawingml/2006/diagram" xmlns:o="urn:schemas-microsoft-com:office:office" xmlns:v="urn:schemas-microsoft-com:vml" xmlns:pvml="urn:schemas-microsoft-com:office:powerpoint" xmlns:com="http://schemas.openxmlformats.org/drawingml/2006/compatibility" xmlns:p15="http://schemas.microsoft.com/office/powerpoint/2012/main" xmlns:ahyp="http://schemas.microsoft.com/office/drawing/2018/hyperlinkcolor">
       <p:transition spd="slow">
         <p:fade/>
       </p:transition>
@@ -16390,7 +16390,7 @@
         <p:fade/>
       </p:transition>
     </mc:Choice>
-    <mc:Fallback xmlns:ahyp="http://schemas.microsoft.com/office/drawing/2018/hyperlinkcolor" xmlns:p15="http://schemas.microsoft.com/office/powerpoint/2012/main" xmlns:com="http://schemas.openxmlformats.org/drawingml/2006/compatibility" xmlns:pvml="urn:schemas-microsoft-com:office:powerpoint" xmlns:v="urn:schemas-microsoft-com:vml" xmlns:o="urn:schemas-microsoft-com:office:office" xmlns:dgm="http://schemas.openxmlformats.org/drawingml/2006/diagram" xmlns:c="http://schemas.openxmlformats.org/drawingml/2006/chart" xmlns:mv="urn:schemas-microsoft-com:mac:vml" xmlns="">
+    <mc:Fallback xmlns="" xmlns:mv="urn:schemas-microsoft-com:mac:vml" xmlns:c="http://schemas.openxmlformats.org/drawingml/2006/chart" xmlns:dgm="http://schemas.openxmlformats.org/drawingml/2006/diagram" xmlns:o="urn:schemas-microsoft-com:office:office" xmlns:v="urn:schemas-microsoft-com:vml" xmlns:pvml="urn:schemas-microsoft-com:office:powerpoint" xmlns:com="http://schemas.openxmlformats.org/drawingml/2006/compatibility" xmlns:p15="http://schemas.microsoft.com/office/powerpoint/2012/main" xmlns:ahyp="http://schemas.microsoft.com/office/drawing/2018/hyperlinkcolor">
       <p:transition spd="slow">
         <p:fade/>
       </p:transition>
@@ -16855,7 +16855,7 @@
         <p:fade/>
       </p:transition>
     </mc:Choice>
-    <mc:Fallback xmlns:ahyp="http://schemas.microsoft.com/office/drawing/2018/hyperlinkcolor" xmlns:p15="http://schemas.microsoft.com/office/powerpoint/2012/main" xmlns:com="http://schemas.openxmlformats.org/drawingml/2006/compatibility" xmlns:pvml="urn:schemas-microsoft-com:office:powerpoint" xmlns:v="urn:schemas-microsoft-com:vml" xmlns:o="urn:schemas-microsoft-com:office:office" xmlns:dgm="http://schemas.openxmlformats.org/drawingml/2006/diagram" xmlns:c="http://schemas.openxmlformats.org/drawingml/2006/chart" xmlns:mv="urn:schemas-microsoft-com:mac:vml" xmlns="">
+    <mc:Fallback xmlns="" xmlns:mv="urn:schemas-microsoft-com:mac:vml" xmlns:c="http://schemas.openxmlformats.org/drawingml/2006/chart" xmlns:dgm="http://schemas.openxmlformats.org/drawingml/2006/diagram" xmlns:o="urn:schemas-microsoft-com:office:office" xmlns:v="urn:schemas-microsoft-com:vml" xmlns:pvml="urn:schemas-microsoft-com:office:powerpoint" xmlns:com="http://schemas.openxmlformats.org/drawingml/2006/compatibility" xmlns:p15="http://schemas.microsoft.com/office/powerpoint/2012/main" xmlns:ahyp="http://schemas.microsoft.com/office/drawing/2018/hyperlinkcolor">
       <p:transition spd="slow">
         <p:fade/>
       </p:transition>
@@ -16919,7 +16919,7 @@
         <p:fade/>
       </p:transition>
     </mc:Choice>
-    <mc:Fallback xmlns:ahyp="http://schemas.microsoft.com/office/drawing/2018/hyperlinkcolor" xmlns:p15="http://schemas.microsoft.com/office/powerpoint/2012/main" xmlns:com="http://schemas.openxmlformats.org/drawingml/2006/compatibility" xmlns:pvml="urn:schemas-microsoft-com:office:powerpoint" xmlns:v="urn:schemas-microsoft-com:vml" xmlns:o="urn:schemas-microsoft-com:office:office" xmlns:dgm="http://schemas.openxmlformats.org/drawingml/2006/diagram" xmlns:c="http://schemas.openxmlformats.org/drawingml/2006/chart" xmlns:mv="urn:schemas-microsoft-com:mac:vml" xmlns="">
+    <mc:Fallback xmlns="" xmlns:mv="urn:schemas-microsoft-com:mac:vml" xmlns:c="http://schemas.openxmlformats.org/drawingml/2006/chart" xmlns:dgm="http://schemas.openxmlformats.org/drawingml/2006/diagram" xmlns:o="urn:schemas-microsoft-com:office:office" xmlns:v="urn:schemas-microsoft-com:vml" xmlns:pvml="urn:schemas-microsoft-com:office:powerpoint" xmlns:com="http://schemas.openxmlformats.org/drawingml/2006/compatibility" xmlns:p15="http://schemas.microsoft.com/office/powerpoint/2012/main" xmlns:ahyp="http://schemas.microsoft.com/office/drawing/2018/hyperlinkcolor">
       <p:transition spd="slow">
         <p:fade/>
       </p:transition>
@@ -17008,7 +17008,7 @@
         <p:fade/>
       </p:transition>
     </mc:Choice>
-    <mc:Fallback xmlns:ahyp="http://schemas.microsoft.com/office/drawing/2018/hyperlinkcolor" xmlns:p15="http://schemas.microsoft.com/office/powerpoint/2012/main" xmlns:com="http://schemas.openxmlformats.org/drawingml/2006/compatibility" xmlns:pvml="urn:schemas-microsoft-com:office:powerpoint" xmlns:v="urn:schemas-microsoft-com:vml" xmlns:o="urn:schemas-microsoft-com:office:office" xmlns:dgm="http://schemas.openxmlformats.org/drawingml/2006/diagram" xmlns:c="http://schemas.openxmlformats.org/drawingml/2006/chart" xmlns:mv="urn:schemas-microsoft-com:mac:vml" xmlns="">
+    <mc:Fallback xmlns="" xmlns:mv="urn:schemas-microsoft-com:mac:vml" xmlns:c="http://schemas.openxmlformats.org/drawingml/2006/chart" xmlns:dgm="http://schemas.openxmlformats.org/drawingml/2006/diagram" xmlns:o="urn:schemas-microsoft-com:office:office" xmlns:v="urn:schemas-microsoft-com:vml" xmlns:pvml="urn:schemas-microsoft-com:office:powerpoint" xmlns:com="http://schemas.openxmlformats.org/drawingml/2006/compatibility" xmlns:p15="http://schemas.microsoft.com/office/powerpoint/2012/main" xmlns:ahyp="http://schemas.microsoft.com/office/drawing/2018/hyperlinkcolor">
       <p:transition spd="slow">
         <p:fade/>
       </p:transition>
@@ -17125,7 +17125,7 @@
         </p:spPr>
         <p:txBody>
           <a:bodyPr spcFirstLastPara="1" wrap="square" lIns="91425" tIns="45700" rIns="91425" bIns="45700" anchor="t" anchorCtr="0">
-            <a:normAutofit/>
+            <a:normAutofit lnSpcReduction="10000"/>
           </a:bodyPr>
           <a:lstStyle/>
           <a:p>
@@ -17171,19 +17171,17 @@
               <a:rPr lang="en-US" sz="2400" dirty="0">
                 <a:latin typeface="+mj-lt"/>
               </a:rPr>
-              <a:t>Project Description: A turn-based console game inspired by the Pokémon series, where players can catch, train, and battle Pokémon. The game features story mode, </a:t>
+              <a:t>Project Description: </a:t>
             </a:r>
             <a:r>
-              <a:rPr lang="en-US" sz="2400" dirty="0" err="1">
-                <a:latin typeface="+mj-lt"/>
-              </a:rPr>
-              <a:t>PvE</a:t>
+              <a:rPr lang="en-US" dirty="0"/>
+              <a:t>This is a turn-based Pokémon console game where players can register, log in, and choose a starter Pokémon. Players explore the world, encounter wild Pokémon, battle NPCs and other players (PvP), catch and train Pokémon, level up, evolve, and manage their team and inventory. The game features a story mode, a Pokémon League challenge, and a Hall of Fame. All core mechanics—battling, catching, healing, and progression—are implemented with a focus on clean architecture and modular design</a:t>
             </a:r>
             <a:r>
               <a:rPr lang="en-US" sz="2400" dirty="0">
                 <a:latin typeface="+mj-lt"/>
               </a:rPr>
-              <a:t> and PvP battles, inventory management, and a progression system.</a:t>
+              <a:t>.</a:t>
             </a:r>
           </a:p>
           <a:p>
@@ -17294,7 +17292,7 @@
         <p:fade/>
       </p:transition>
     </mc:Choice>
-    <mc:Fallback xmlns:ahyp="http://schemas.microsoft.com/office/drawing/2018/hyperlinkcolor" xmlns:p15="http://schemas.microsoft.com/office/powerpoint/2012/main" xmlns:com="http://schemas.openxmlformats.org/drawingml/2006/compatibility" xmlns:pvml="urn:schemas-microsoft-com:office:powerpoint" xmlns:v="urn:schemas-microsoft-com:vml" xmlns:o="urn:schemas-microsoft-com:office:office" xmlns:dgm="http://schemas.openxmlformats.org/drawingml/2006/diagram" xmlns:c="http://schemas.openxmlformats.org/drawingml/2006/chart" xmlns:mv="urn:schemas-microsoft-com:mac:vml" xmlns="">
+    <mc:Fallback xmlns="" xmlns:mv="urn:schemas-microsoft-com:mac:vml" xmlns:c="http://schemas.openxmlformats.org/drawingml/2006/chart" xmlns:dgm="http://schemas.openxmlformats.org/drawingml/2006/diagram" xmlns:o="urn:schemas-microsoft-com:office:office" xmlns:v="urn:schemas-microsoft-com:vml" xmlns:pvml="urn:schemas-microsoft-com:office:powerpoint" xmlns:com="http://schemas.openxmlformats.org/drawingml/2006/compatibility" xmlns:p15="http://schemas.microsoft.com/office/powerpoint/2012/main" xmlns:ahyp="http://schemas.microsoft.com/office/drawing/2018/hyperlinkcolor">
       <p:transition spd="slow">
         <p:fade/>
       </p:transition>
@@ -17536,7 +17534,7 @@
         <p:fade/>
       </p:transition>
     </mc:Choice>
-    <mc:Fallback xmlns:ahyp="http://schemas.microsoft.com/office/drawing/2018/hyperlinkcolor" xmlns:p15="http://schemas.microsoft.com/office/powerpoint/2012/main" xmlns:com="http://schemas.openxmlformats.org/drawingml/2006/compatibility" xmlns:pvml="urn:schemas-microsoft-com:office:powerpoint" xmlns:v="urn:schemas-microsoft-com:vml" xmlns:o="urn:schemas-microsoft-com:office:office" xmlns:dgm="http://schemas.openxmlformats.org/drawingml/2006/diagram" xmlns:c="http://schemas.openxmlformats.org/drawingml/2006/chart" xmlns:mv="urn:schemas-microsoft-com:mac:vml" xmlns="">
+    <mc:Fallback xmlns="" xmlns:mv="urn:schemas-microsoft-com:mac:vml" xmlns:c="http://schemas.openxmlformats.org/drawingml/2006/chart" xmlns:dgm="http://schemas.openxmlformats.org/drawingml/2006/diagram" xmlns:o="urn:schemas-microsoft-com:office:office" xmlns:v="urn:schemas-microsoft-com:vml" xmlns:pvml="urn:schemas-microsoft-com:office:powerpoint" xmlns:com="http://schemas.openxmlformats.org/drawingml/2006/compatibility" xmlns:p15="http://schemas.microsoft.com/office/powerpoint/2012/main" xmlns:ahyp="http://schemas.microsoft.com/office/drawing/2018/hyperlinkcolor">
       <p:transition spd="slow">
         <p:fade/>
       </p:transition>
@@ -17881,7 +17879,7 @@
         <p:fade/>
       </p:transition>
     </mc:Choice>
-    <mc:Fallback xmlns:ahyp="http://schemas.microsoft.com/office/drawing/2018/hyperlinkcolor" xmlns:p15="http://schemas.microsoft.com/office/powerpoint/2012/main" xmlns:com="http://schemas.openxmlformats.org/drawingml/2006/compatibility" xmlns:pvml="urn:schemas-microsoft-com:office:powerpoint" xmlns:v="urn:schemas-microsoft-com:vml" xmlns:o="urn:schemas-microsoft-com:office:office" xmlns:dgm="http://schemas.openxmlformats.org/drawingml/2006/diagram" xmlns:c="http://schemas.openxmlformats.org/drawingml/2006/chart" xmlns:mv="urn:schemas-microsoft-com:mac:vml" xmlns="">
+    <mc:Fallback xmlns="" xmlns:mv="urn:schemas-microsoft-com:mac:vml" xmlns:c="http://schemas.openxmlformats.org/drawingml/2006/chart" xmlns:dgm="http://schemas.openxmlformats.org/drawingml/2006/diagram" xmlns:o="urn:schemas-microsoft-com:office:office" xmlns:v="urn:schemas-microsoft-com:vml" xmlns:pvml="urn:schemas-microsoft-com:office:powerpoint" xmlns:com="http://schemas.openxmlformats.org/drawingml/2006/compatibility" xmlns:p15="http://schemas.microsoft.com/office/powerpoint/2012/main" xmlns:ahyp="http://schemas.microsoft.com/office/drawing/2018/hyperlinkcolor">
       <p:transition spd="slow">
         <p:fade/>
       </p:transition>
@@ -18132,7 +18130,7 @@
         <p:fade/>
       </p:transition>
     </mc:Choice>
-    <mc:Fallback xmlns:ahyp="http://schemas.microsoft.com/office/drawing/2018/hyperlinkcolor" xmlns:p15="http://schemas.microsoft.com/office/powerpoint/2012/main" xmlns:com="http://schemas.openxmlformats.org/drawingml/2006/compatibility" xmlns:pvml="urn:schemas-microsoft-com:office:powerpoint" xmlns:v="urn:schemas-microsoft-com:vml" xmlns:o="urn:schemas-microsoft-com:office:office" xmlns:dgm="http://schemas.openxmlformats.org/drawingml/2006/diagram" xmlns:c="http://schemas.openxmlformats.org/drawingml/2006/chart" xmlns:mv="urn:schemas-microsoft-com:mac:vml" xmlns="">
+    <mc:Fallback xmlns="" xmlns:mv="urn:schemas-microsoft-com:mac:vml" xmlns:c="http://schemas.openxmlformats.org/drawingml/2006/chart" xmlns:dgm="http://schemas.openxmlformats.org/drawingml/2006/diagram" xmlns:o="urn:schemas-microsoft-com:office:office" xmlns:v="urn:schemas-microsoft-com:vml" xmlns:pvml="urn:schemas-microsoft-com:office:powerpoint" xmlns:com="http://schemas.openxmlformats.org/drawingml/2006/compatibility" xmlns:p15="http://schemas.microsoft.com/office/powerpoint/2012/main" xmlns:ahyp="http://schemas.microsoft.com/office/drawing/2018/hyperlinkcolor">
       <p:transition spd="slow">
         <p:fade/>
       </p:transition>
@@ -18325,7 +18323,7 @@
         <p:fade/>
       </p:transition>
     </mc:Choice>
-    <mc:Fallback xmlns:ahyp="http://schemas.microsoft.com/office/drawing/2018/hyperlinkcolor" xmlns:p15="http://schemas.microsoft.com/office/powerpoint/2012/main" xmlns:com="http://schemas.openxmlformats.org/drawingml/2006/compatibility" xmlns:pvml="urn:schemas-microsoft-com:office:powerpoint" xmlns:v="urn:schemas-microsoft-com:vml" xmlns:o="urn:schemas-microsoft-com:office:office" xmlns:dgm="http://schemas.openxmlformats.org/drawingml/2006/diagram" xmlns:c="http://schemas.openxmlformats.org/drawingml/2006/chart" xmlns:mv="urn:schemas-microsoft-com:mac:vml" xmlns="">
+    <mc:Fallback xmlns="" xmlns:mv="urn:schemas-microsoft-com:mac:vml" xmlns:c="http://schemas.openxmlformats.org/drawingml/2006/chart" xmlns:dgm="http://schemas.openxmlformats.org/drawingml/2006/diagram" xmlns:o="urn:schemas-microsoft-com:office:office" xmlns:v="urn:schemas-microsoft-com:vml" xmlns:pvml="urn:schemas-microsoft-com:office:powerpoint" xmlns:com="http://schemas.openxmlformats.org/drawingml/2006/compatibility" xmlns:p15="http://schemas.microsoft.com/office/powerpoint/2012/main" xmlns:ahyp="http://schemas.microsoft.com/office/drawing/2018/hyperlinkcolor">
       <p:transition spd="slow">
         <p:fade/>
       </p:transition>
@@ -18521,7 +18519,7 @@
         <p:fade/>
       </p:transition>
     </mc:Choice>
-    <mc:Fallback xmlns:ahyp="http://schemas.microsoft.com/office/drawing/2018/hyperlinkcolor" xmlns:p15="http://schemas.microsoft.com/office/powerpoint/2012/main" xmlns:com="http://schemas.openxmlformats.org/drawingml/2006/compatibility" xmlns:pvml="urn:schemas-microsoft-com:office:powerpoint" xmlns:v="urn:schemas-microsoft-com:vml" xmlns:o="urn:schemas-microsoft-com:office:office" xmlns:dgm="http://schemas.openxmlformats.org/drawingml/2006/diagram" xmlns:c="http://schemas.openxmlformats.org/drawingml/2006/chart" xmlns:mv="urn:schemas-microsoft-com:mac:vml" xmlns="">
+    <mc:Fallback xmlns="" xmlns:mv="urn:schemas-microsoft-com:mac:vml" xmlns:c="http://schemas.openxmlformats.org/drawingml/2006/chart" xmlns:dgm="http://schemas.openxmlformats.org/drawingml/2006/diagram" xmlns:o="urn:schemas-microsoft-com:office:office" xmlns:v="urn:schemas-microsoft-com:vml" xmlns:pvml="urn:schemas-microsoft-com:office:powerpoint" xmlns:com="http://schemas.openxmlformats.org/drawingml/2006/compatibility" xmlns:p15="http://schemas.microsoft.com/office/powerpoint/2012/main" xmlns:ahyp="http://schemas.microsoft.com/office/drawing/2018/hyperlinkcolor">
       <p:transition spd="slow">
         <p:fade/>
       </p:transition>
@@ -18845,7 +18843,7 @@
         <p:fade/>
       </p:transition>
     </mc:Choice>
-    <mc:Fallback xmlns:ahyp="http://schemas.microsoft.com/office/drawing/2018/hyperlinkcolor" xmlns:p15="http://schemas.microsoft.com/office/powerpoint/2012/main" xmlns:com="http://schemas.openxmlformats.org/drawingml/2006/compatibility" xmlns:pvml="urn:schemas-microsoft-com:office:powerpoint" xmlns:v="urn:schemas-microsoft-com:vml" xmlns:o="urn:schemas-microsoft-com:office:office" xmlns:dgm="http://schemas.openxmlformats.org/drawingml/2006/diagram" xmlns:c="http://schemas.openxmlformats.org/drawingml/2006/chart" xmlns:mv="urn:schemas-microsoft-com:mac:vml" xmlns="">
+    <mc:Fallback xmlns="" xmlns:mv="urn:schemas-microsoft-com:mac:vml" xmlns:c="http://schemas.openxmlformats.org/drawingml/2006/chart" xmlns:dgm="http://schemas.openxmlformats.org/drawingml/2006/diagram" xmlns:o="urn:schemas-microsoft-com:office:office" xmlns:v="urn:schemas-microsoft-com:vml" xmlns:pvml="urn:schemas-microsoft-com:office:powerpoint" xmlns:com="http://schemas.openxmlformats.org/drawingml/2006/compatibility" xmlns:p15="http://schemas.microsoft.com/office/powerpoint/2012/main" xmlns:ahyp="http://schemas.microsoft.com/office/drawing/2018/hyperlinkcolor">
       <p:transition spd="slow">
         <p:fade/>
       </p:transition>
